--- a/docs/free-rwe-resources/train-the-trainer/training/day-05-treatment-pathways/kit/Instructor-Deck-with-Notes.pptx
+++ b/docs/free-rwe-resources/train-the-trainer/training/day-05-treatment-pathways/kit/Instructor-Deck-with-Notes.pptx
@@ -23,7 +23,7 @@
     <p:sldId id="271" r:id="rId23"/>
     <p:sldId id="272" r:id="rId24"/>
   </p:sldIdLst>
-  <p:sldSz cx="9144000" cy="6858000" type="screen4x3"/>
+  <p:sldSz cx="12192000" cy="6858000" type="screen4x3"/>
   <p:notesSz cx="6858000" cy="9144000"/>
   <p:defaultTextStyle>
     <a:defPPr>
@@ -518,7 +518,7 @@
           <a:lstStyle/>
           <a:p>
             <a:r>
-              <a:t>Welcome everyone. This session introduces Treatment Pathway Analysis using the OHDSI ATLAS tool. We’ll focus on a diabetes use case and balance conceptual foundations with practical interpretation.</a:t>
+              <a:t>This deck is the diabetes worked example for Day 5. Teach the concepts and the ATLAS walkthrough from ATLAS-Treatment-Pathways-Training.pptx first, then use this deck to work one example from cohorts to interpretation.</a:t>
             </a:r>
           </a:p>
         </p:txBody>
@@ -588,7 +588,7 @@
           <a:lstStyle/>
           <a:p>
             <a:r>
-              <a:t>These design parameters control how treatments are sequenced and grouped.</a:t>
+              <a:t>These are the settings ATLAS Cohort Pathways offers. The combination window (labeled Collapse Days in some ATLAS versions) is about how close two event start dates are: starts that fall within the window are given the earliest date and shown as one combined step. How long an exposure lasts, and the gap allowed between fills, are set in each event cohort's exit rule. Follow-up time comes from the target cohort.</a:t>
             </a:r>
           </a:p>
         </p:txBody>
@@ -728,7 +728,7 @@
           <a:lstStyle/>
           <a:p>
             <a:r>
-              <a:t>Interpretation requires both clinical and analytic context. Not every branch implies inappropriate care.</a:t>
+              <a:t>ATLAS shows pathways as a sunburst plot, with a Tabular button for the same results as a table. Each ring outward is the next step, the size of an arc shows the share of people on that path, and the end of a pathway is shown in grey. People in the target cohort who never enter any event cohort are left out of the analysis. Interpretation needs both clinical and analytic context, and a branch is not evidence of inappropriate care.</a:t>
             </a:r>
           </a:p>
         </p:txBody>
@@ -798,7 +798,7 @@
           <a:lstStyle/>
           <a:p>
             <a:r>
-              <a:t>Subgroup analysis helps identify inequities or systematic differences in care.</a:t>
+              <a:t>ATLAS Cohort Pathways has no stratification setting. To compare subgroups, build one target cohort per subgroup and add them to the same analysis; ATLAS reports each target cohort separately.</a:t>
             </a:r>
           </a:p>
         </p:txBody>
@@ -1288,7 +1288,7 @@
           <a:lstStyle/>
           <a:p>
             <a:r>
-              <a:t>Type 2 diabetes is ideal for pathway analysis because treatment is sequential and acknowledgement of guideline versus real-world divergence is important.</a:t>
+              <a:t>Type 2 diabetes is a common teaching example because several drug classes are used over time, which gives the sequences something to show. Hripcsak et al. (PNAS 2016) reported that diabetes favored a single first-line medication, metformin, more than hypertension or depression did, with significant heterogeneity among data sources. Present the list as something to test in the data, not as a rule.</a:t>
             </a:r>
           </a:p>
         </p:txBody>
@@ -1358,7 +1358,7 @@
           <a:lstStyle/>
           <a:p>
             <a:r>
-              <a:t>Treatment pathway analysis is descriptive but powerful. It allows us to see what actually happens, not what guidelines recommend.</a:t>
+              <a:t>Treatment pathway analysis is descriptive. It shows the sequences recorded in the data, which may differ from what guidelines recommend and from what was prescribed but never recorded.</a:t>
             </a:r>
           </a:p>
         </p:txBody>
@@ -1428,7 +1428,7 @@
           <a:lstStyle/>
           <a:p>
             <a:r>
-              <a:t>All pathway analyses depend on OMOP structure. Drug exposures drive the sequence, and ingredient-level concepts provide clarity for interpretation.</a:t>
+              <a:t>All pathway analyses depend on the OMOP structure. Drug exposures drive the sequence. In ATLAS each step is an event cohort, built beforehand from a concept set at the ingredient or class level.</a:t>
             </a:r>
           </a:p>
         </p:txBody>
@@ -1498,7 +1498,7 @@
           <a:lstStyle/>
           <a:p>
             <a:r>
-              <a:t>In ATLAS, Treatment Pathway Analysis is accessed under Characterizations. We always start with a well-defined cohort.</a:t>
+              <a:t>In ATLAS the feature is named Cohort Pathways and has its own entry in the left menu. Start from a target cohort and a set of event cohorts that have already been generated.</a:t>
             </a:r>
           </a:p>
         </p:txBody>
@@ -1638,7 +1638,7 @@
           <a:lstStyle/>
           <a:p>
             <a:r>
-              <a:t>We’re using ingredient-level concepts to avoid ambiguity across drug products.</a:t>
+              <a:t>Each item is its own event cohort. Metformin is a single ingredient; the others are drug classes, built from a class concept or a list of ingredients with descendants included. Cohort Pathways takes cohorts as input, not concept sets.</a:t>
             </a:r>
           </a:p>
         </p:txBody>
@@ -1692,8 +1692,8 @@
         </p:nvSpPr>
         <p:spPr>
           <a:xfrm>
-            <a:off x="685800" y="2130425"/>
-            <a:ext cx="7772400" cy="1470025"/>
+            <a:off x="914400" y="2130425"/>
+            <a:ext cx="10363200" cy="1470025"/>
           </a:xfrm>
         </p:spPr>
         <p:txBody>
@@ -1720,14 +1720,14 @@
         </p:nvSpPr>
         <p:spPr>
           <a:xfrm>
-            <a:off x="1371600" y="3886200"/>
-            <a:ext cx="6400800" cy="1752600"/>
+            <a:off x="1828800" y="3886200"/>
+            <a:ext cx="8534400" cy="1752600"/>
           </a:xfrm>
         </p:spPr>
         <p:txBody>
           <a:bodyPr/>
           <a:lstStyle>
-            <a:lvl1pPr marL="0" indent="0" algn="ctr">
+            <a:lvl1pPr marL="0" indent="0" algn="l">
               <a:buNone/>
               <a:defRPr>
                 <a:solidFill>
@@ -2104,8 +2104,8 @@
         </p:nvSpPr>
         <p:spPr>
           <a:xfrm>
-            <a:off x="6629400" y="274638"/>
-            <a:ext cx="2057400" cy="5851525"/>
+            <a:off x="8839200" y="274638"/>
+            <a:ext cx="2743200" cy="5851525"/>
           </a:xfrm>
         </p:spPr>
         <p:txBody>
@@ -2132,8 +2132,8 @@
         </p:nvSpPr>
         <p:spPr>
           <a:xfrm>
-            <a:off x="457200" y="274638"/>
-            <a:ext cx="6019800" cy="5851525"/>
+            <a:off x="609600" y="274638"/>
+            <a:ext cx="8026400" cy="5851525"/>
           </a:xfrm>
         </p:spPr>
         <p:txBody>
@@ -2454,46 +2454,46 @@
         </p:nvSpPr>
         <p:spPr>
           <a:xfrm>
-            <a:off x="722313" y="4406900"/>
-            <a:ext cx="7772400" cy="1362075"/>
+            <a:off x="963084" y="1920240"/>
+            <a:ext cx="10363200" cy="1280160"/>
           </a:xfrm>
         </p:spPr>
         <p:txBody>
+          <a:bodyPr anchor="b"/>
+          <a:lstStyle>
+            <a:lvl1pPr algn="l">
+              <a:defRPr sz="4000" b="1"/>
+            </a:lvl1pPr>
+          </a:lstStyle>
+          <a:p>
+            <a:r>
+              <a:rPr lang="en-US" smtClean="0"/>
+              <a:t>Click to edit Master title style</a:t>
+            </a:r>
+            <a:endParaRPr lang="en-US"/>
+          </a:p>
+        </p:txBody>
+      </p:sp>
+      <p:sp>
+        <p:nvSpPr>
+          <p:cNvPr id="3" name="Text Placeholder 2"/>
+          <p:cNvSpPr>
+            <a:spLocks noGrp="1"/>
+          </p:cNvSpPr>
+          <p:nvPr>
+            <p:ph type="body" idx="1"/>
+          </p:nvPr>
+        </p:nvSpPr>
+        <p:spPr>
+          <a:xfrm>
+            <a:off x="963084" y="3291840"/>
+            <a:ext cx="10363200" cy="1828800"/>
+          </a:xfrm>
+        </p:spPr>
+        <p:txBody>
           <a:bodyPr anchor="t"/>
           <a:lstStyle>
-            <a:lvl1pPr algn="l">
-              <a:defRPr sz="4000" b="1" cap="all"/>
-            </a:lvl1pPr>
-          </a:lstStyle>
-          <a:p>
-            <a:r>
-              <a:rPr lang="en-US" smtClean="0"/>
-              <a:t>Click to edit Master title style</a:t>
-            </a:r>
-            <a:endParaRPr lang="en-US"/>
-          </a:p>
-        </p:txBody>
-      </p:sp>
-      <p:sp>
-        <p:nvSpPr>
-          <p:cNvPr id="3" name="Text Placeholder 2"/>
-          <p:cNvSpPr>
-            <a:spLocks noGrp="1"/>
-          </p:cNvSpPr>
-          <p:nvPr>
-            <p:ph type="body" idx="1"/>
-          </p:nvPr>
-        </p:nvSpPr>
-        <p:spPr>
-          <a:xfrm>
-            <a:off x="722313" y="2906713"/>
-            <a:ext cx="7772400" cy="1500187"/>
-          </a:xfrm>
-        </p:spPr>
-        <p:txBody>
-          <a:bodyPr anchor="b"/>
-          <a:lstStyle>
-            <a:lvl1pPr marL="0" indent="0">
+            <a:lvl1pPr marL="0" indent="0" algn="l">
               <a:buNone/>
               <a:defRPr sz="2000">
                 <a:solidFill>
@@ -2585,7 +2585,7 @@
             </a:lvl9pPr>
           </a:lstStyle>
           <a:p>
-            <a:pPr lvl="0"/>
+            <a:pPr lvl="0" algn="l"/>
             <a:r>
               <a:rPr lang="en-US" smtClean="0"/>
               <a:t>Click to edit Master text styles</a:t>
@@ -2723,8 +2723,8 @@
         </p:nvSpPr>
         <p:spPr>
           <a:xfrm>
-            <a:off x="457200" y="1600200"/>
-            <a:ext cx="4038600" cy="4525963"/>
+            <a:off x="609600" y="1600200"/>
+            <a:ext cx="5384800" cy="4525963"/>
           </a:xfrm>
         </p:spPr>
         <p:txBody>
@@ -2808,8 +2808,8 @@
         </p:nvSpPr>
         <p:spPr>
           <a:xfrm>
-            <a:off x="4648200" y="1600200"/>
-            <a:ext cx="4038600" cy="4525963"/>
+            <a:off x="6197600" y="1600200"/>
+            <a:ext cx="5384800" cy="4525963"/>
           </a:xfrm>
         </p:spPr>
         <p:txBody>
@@ -3015,8 +3015,8 @@
         </p:nvSpPr>
         <p:spPr>
           <a:xfrm>
-            <a:off x="457200" y="1535113"/>
-            <a:ext cx="4040188" cy="639762"/>
+            <a:off x="609600" y="1535113"/>
+            <a:ext cx="5386917" cy="639762"/>
           </a:xfrm>
         </p:spPr>
         <p:txBody>
@@ -3080,8 +3080,8 @@
         </p:nvSpPr>
         <p:spPr>
           <a:xfrm>
-            <a:off x="457200" y="2174875"/>
-            <a:ext cx="4040188" cy="3951288"/>
+            <a:off x="609600" y="2174875"/>
+            <a:ext cx="5386917" cy="3951288"/>
           </a:xfrm>
         </p:spPr>
         <p:txBody>
@@ -3165,8 +3165,8 @@
         </p:nvSpPr>
         <p:spPr>
           <a:xfrm>
-            <a:off x="4645025" y="1535113"/>
-            <a:ext cx="4041775" cy="639762"/>
+            <a:off x="6193366" y="1535113"/>
+            <a:ext cx="5389033" cy="639762"/>
           </a:xfrm>
         </p:spPr>
         <p:txBody>
@@ -3230,8 +3230,8 @@
         </p:nvSpPr>
         <p:spPr>
           <a:xfrm>
-            <a:off x="4645025" y="2174875"/>
-            <a:ext cx="4041775" cy="3951288"/>
+            <a:off x="6193366" y="2174875"/>
+            <a:ext cx="5389033" cy="3951288"/>
           </a:xfrm>
         </p:spPr>
         <p:txBody>
@@ -3623,8 +3623,8 @@
         </p:nvSpPr>
         <p:spPr>
           <a:xfrm>
-            <a:off x="457200" y="273050"/>
-            <a:ext cx="3008313" cy="1162050"/>
+            <a:off x="609600" y="273050"/>
+            <a:ext cx="4011084" cy="1162050"/>
           </a:xfrm>
         </p:spPr>
         <p:txBody>
@@ -3655,8 +3655,8 @@
         </p:nvSpPr>
         <p:spPr>
           <a:xfrm>
-            <a:off x="3575050" y="273050"/>
-            <a:ext cx="5111750" cy="5853113"/>
+            <a:off x="4766733" y="273050"/>
+            <a:ext cx="6815666" cy="5853113"/>
           </a:xfrm>
         </p:spPr>
         <p:txBody>
@@ -3740,8 +3740,8 @@
         </p:nvSpPr>
         <p:spPr>
           <a:xfrm>
-            <a:off x="457200" y="1435100"/>
-            <a:ext cx="3008313" cy="4691063"/>
+            <a:off x="609600" y="1435100"/>
+            <a:ext cx="4011084" cy="4691063"/>
           </a:xfrm>
         </p:spPr>
         <p:txBody>
@@ -3900,8 +3900,8 @@
         </p:nvSpPr>
         <p:spPr>
           <a:xfrm>
-            <a:off x="1792288" y="4800600"/>
-            <a:ext cx="5486400" cy="566738"/>
+            <a:off x="2389717" y="4800600"/>
+            <a:ext cx="7315200" cy="566738"/>
           </a:xfrm>
         </p:spPr>
         <p:txBody>
@@ -3932,8 +3932,8 @@
         </p:nvSpPr>
         <p:spPr>
           <a:xfrm>
-            <a:off x="1792288" y="612775"/>
-            <a:ext cx="5486400" cy="4114800"/>
+            <a:off x="2389717" y="612775"/>
+            <a:ext cx="7315200" cy="4114800"/>
           </a:xfrm>
         </p:spPr>
         <p:txBody>
@@ -3993,8 +3993,8 @@
         </p:nvSpPr>
         <p:spPr>
           <a:xfrm>
-            <a:off x="1792288" y="5367338"/>
-            <a:ext cx="5486400" cy="804862"/>
+            <a:off x="2389717" y="5367338"/>
+            <a:ext cx="7315200" cy="804862"/>
           </a:xfrm>
         </p:spPr>
         <p:txBody>
@@ -4158,8 +4158,8 @@
         </p:nvSpPr>
         <p:spPr>
           <a:xfrm>
-            <a:off x="457200" y="274638"/>
-            <a:ext cx="8229600" cy="1143000"/>
+            <a:off x="609600" y="274638"/>
+            <a:ext cx="10972800" cy="1143000"/>
           </a:xfrm>
           <a:prstGeom prst="rect">
             <a:avLst/>
@@ -4191,8 +4191,8 @@
         </p:nvSpPr>
         <p:spPr>
           <a:xfrm>
-            <a:off x="457200" y="1600200"/>
-            <a:ext cx="8229600" cy="4525963"/>
+            <a:off x="609600" y="1600200"/>
+            <a:ext cx="10972800" cy="4525963"/>
           </a:xfrm>
           <a:prstGeom prst="rect">
             <a:avLst/>
@@ -4253,8 +4253,8 @@
         </p:nvSpPr>
         <p:spPr>
           <a:xfrm>
-            <a:off x="457200" y="6356350"/>
-            <a:ext cx="2133600" cy="365125"/>
+            <a:off x="609600" y="6356350"/>
+            <a:ext cx="2844800" cy="365125"/>
           </a:xfrm>
           <a:prstGeom prst="rect">
             <a:avLst/>
@@ -4294,8 +4294,8 @@
         </p:nvSpPr>
         <p:spPr>
           <a:xfrm>
-            <a:off x="3124200" y="6356350"/>
-            <a:ext cx="2895600" cy="365125"/>
+            <a:off x="4165600" y="6356350"/>
+            <a:ext cx="3860800" cy="365125"/>
           </a:xfrm>
           <a:prstGeom prst="rect">
             <a:avLst/>
@@ -4331,8 +4331,8 @@
         </p:nvSpPr>
         <p:spPr>
           <a:xfrm>
-            <a:off x="6553200" y="6356350"/>
-            <a:ext cx="2133600" cy="365125"/>
+            <a:off x="8737600" y="6356350"/>
+            <a:ext cx="2844800" cy="365125"/>
           </a:xfrm>
           <a:prstGeom prst="rect">
             <a:avLst/>
@@ -4360,30 +4360,6 @@
           </a:p>
         </p:txBody>
       </p:sp>
-      <p:pic>
-        <p:nvPicPr>
-          <p:cNvPr id="9901" name="ALS TDI Logo"/>
-          <p:cNvPicPr>
-            <a:picLocks noChangeAspect="1"/>
-          </p:cNvPicPr>
-          <p:nvPr/>
-        </p:nvPicPr>
-        <p:blipFill>
-          <a:blip r:embed="rId13"/>
-          <a:stretch>
-            <a:fillRect/>
-          </a:stretch>
-        </p:blipFill>
-        <p:spPr>
-          <a:xfrm>
-            <a:off x="8065008" y="6043049"/>
-            <a:ext cx="914400" cy="705223"/>
-          </a:xfrm>
-          <a:prstGeom prst="rect">
-            <a:avLst/>
-          </a:prstGeom>
-        </p:spPr>
-      </p:pic>
     </p:spTree>
     <p:extLst>
       <p:ext uri="{BB962C8B-B14F-4D97-AF65-F5344CB8AC3E}">
@@ -4407,12 +4383,12 @@
   </p:sldLayoutIdLst>
   <p:txStyles>
     <p:titleStyle>
-      <a:lvl1pPr algn="ctr" defTabSz="457200" rtl="0" eaLnBrk="1" latinLnBrk="0" hangingPunct="1">
+      <a:lvl1pPr algn="l" defTabSz="457200" rtl="0" eaLnBrk="1" latinLnBrk="0" hangingPunct="1">
         <a:spcBef>
           <a:spcPct val="0"/>
         </a:spcBef>
         <a:buNone/>
-        <a:defRPr sz="4400" kern="1200">
+        <a:defRPr sz="3200" kern="1200" b="1">
           <a:solidFill>
             <a:schemeClr val="tx1"/>
           </a:solidFill>
@@ -4429,7 +4405,7 @@
         </a:spcBef>
         <a:buFont typeface="Arial"/>
         <a:buChar char="•"/>
-        <a:defRPr sz="3200" kern="1200">
+        <a:defRPr sz="2000" kern="1200">
           <a:solidFill>
             <a:schemeClr val="tx1"/>
           </a:solidFill>
@@ -4444,7 +4420,7 @@
         </a:spcBef>
         <a:buFont typeface="Arial"/>
         <a:buChar char="–"/>
-        <a:defRPr sz="2800" kern="1200">
+        <a:defRPr sz="1800" kern="1200">
           <a:solidFill>
             <a:schemeClr val="tx1"/>
           </a:solidFill>
@@ -4459,7 +4435,7 @@
         </a:spcBef>
         <a:buFont typeface="Arial"/>
         <a:buChar char="•"/>
-        <a:defRPr sz="2400" kern="1200">
+        <a:defRPr sz="1600" kern="1200">
           <a:solidFill>
             <a:schemeClr val="tx1"/>
           </a:solidFill>
@@ -4474,7 +4450,7 @@
         </a:spcBef>
         <a:buFont typeface="Arial"/>
         <a:buChar char="–"/>
-        <a:defRPr sz="2000" kern="1200">
+        <a:defRPr sz="1400" kern="1200">
           <a:solidFill>
             <a:schemeClr val="tx1"/>
           </a:solidFill>
@@ -4489,7 +4465,7 @@
         </a:spcBef>
         <a:buFont typeface="Arial"/>
         <a:buChar char="»"/>
-        <a:defRPr sz="2000" kern="1200">
+        <a:defRPr sz="1400" kern="1200">
           <a:solidFill>
             <a:schemeClr val="tx1"/>
           </a:solidFill>
@@ -4675,50 +4651,54 @@
             <a:spLocks noGrp="1"/>
           </p:cNvSpPr>
           <p:nvPr>
-            <p:ph type="title"/>
-          </p:nvPr>
-        </p:nvSpPr>
-        <p:spPr/>
-        <p:txBody>
-          <a:bodyPr/>
-          <a:lstStyle/>
-          <a:p>
-            <a:r>
-              <a:t>OHDSI / OMOP Training</a:t>
-            </a:r>
-          </a:p>
-          <a:p>
-            <a:r>
-              <a:t>Treatment Pathway Analysis (Diabetes)</a:t>
-            </a:r>
-          </a:p>
-        </p:txBody>
-      </p:sp>
-      <p:sp>
-        <p:nvSpPr>
-          <p:cNvPr id="3" name="Content Placeholder 2"/>
-          <p:cNvSpPr>
-            <a:spLocks noGrp="1"/>
-          </p:cNvSpPr>
-          <p:nvPr>
-            <p:ph idx="1"/>
-          </p:nvPr>
-        </p:nvSpPr>
-        <p:spPr/>
-        <p:txBody>
-          <a:bodyPr/>
-          <a:lstStyle/>
-          <a:p>
-            <a:r>
-              <a:t>Level: Introductory</a:t>
-            </a:r>
-          </a:p>
-          <a:p>
-            <a:r>
-              <a:t>Duration: 90 minutes</a:t>
-            </a:r>
-          </a:p>
-          <a:p>
+            <p:ph type="ctrTitle"/>
+          </p:nvPr>
+        </p:nvSpPr>
+        <p:spPr/>
+        <p:txBody>
+          <a:bodyPr/>
+          <a:lstStyle/>
+          <a:p>
+            <a:r>
+              <a:t>OHDSI / OMOP Training: Treatment Pathway Analysis (Diabetes)</a:t>
+            </a:r>
+          </a:p>
+        </p:txBody>
+      </p:sp>
+      <p:sp>
+        <p:nvSpPr>
+          <p:cNvPr id="3" name="Subtitle 2"/>
+          <p:cNvSpPr>
+            <a:spLocks noGrp="1"/>
+          </p:cNvSpPr>
+          <p:nvPr>
+            <p:ph type="subTitle" idx="1"/>
+          </p:nvPr>
+        </p:nvSpPr>
+        <p:spPr/>
+        <p:txBody>
+          <a:bodyPr/>
+          <a:lstStyle/>
+          <a:p>
+            <a:pPr marL="0" indent="0">
+              <a:buNone/>
+            </a:pPr>
+            <a:r>
+              <a:t>Worked example for Day 5 (use after the ATLAS Cohort Pathways deck)</a:t>
+            </a:r>
+          </a:p>
+          <a:p>
+            <a:pPr marL="0" indent="0">
+              <a:buNone/>
+            </a:pPr>
+            <a:r>
+              <a:t>Duration: about 60 minutes within the half-day session</a:t>
+            </a:r>
+          </a:p>
+          <a:p>
+            <a:pPr marL="0" indent="0">
+              <a:buNone/>
+            </a:pPr>
             <a:r>
               <a:t>Audience: Analysts, Clinicians, Epidemiologists, Data Scientists</a:t>
             </a:r>
@@ -4779,18 +4759,24 @@
           <a:bodyPr/>
           <a:lstStyle/>
           <a:p>
-            <a:r>
-              <a:t>- Time-at-risk</a:t>
-            </a:r>
-          </a:p>
-          <a:p>
-            <a:r>
-              <a:t>- Minimum exposure duration</a:t>
-            </a:r>
-          </a:p>
-          <a:p>
-            <a:r>
-              <a:t>- Combination handling</a:t>
+            <a:pPr/>
+            <a:r>
+              <a:rPr sz="2400"/>
+              <a:t>Combination window</a:t>
+            </a:r>
+          </a:p>
+          <a:p>
+            <a:pPr/>
+            <a:r>
+              <a:rPr sz="2400"/>
+              <a:t>Minimum cell count</a:t>
+            </a:r>
+          </a:p>
+          <a:p>
+            <a:pPr/>
+            <a:r>
+              <a:rPr sz="2400"/>
+              <a:t>Maximum path length, allow repeats</a:t>
             </a:r>
           </a:p>
         </p:txBody>
@@ -4849,8 +4835,10 @@
           <a:bodyPr/>
           <a:lstStyle/>
           <a:p>
-            <a:r>
-              <a:t>Select cohort → Select drugs → Run analysis → View pathways</a:t>
+            <a:pPr/>
+            <a:r>
+              <a:rPr sz="2400"/>
+              <a:t>Target cohort → Event cohorts → Settings → Generate → View the sunburst</a:t>
             </a:r>
           </a:p>
         </p:txBody>
@@ -4909,18 +4897,24 @@
           <a:bodyPr/>
           <a:lstStyle/>
           <a:p>
-            <a:r>
-              <a:t>- Arrow width = patient proportion</a:t>
-            </a:r>
-          </a:p>
-          <a:p>
-            <a:r>
-              <a:t>- Branching = variation</a:t>
-            </a:r>
-          </a:p>
-          <a:p>
-            <a:r>
-              <a:t>- Loops = cycling</a:t>
+            <a:pPr/>
+            <a:r>
+              <a:rPr sz="2400"/>
+              <a:t>Arc size = share of the target cohort</a:t>
+            </a:r>
+          </a:p>
+          <a:p>
+            <a:pPr/>
+            <a:r>
+              <a:rPr sz="2400"/>
+              <a:t>Branching = variation</a:t>
+            </a:r>
+          </a:p>
+          <a:p>
+            <a:pPr/>
+            <a:r>
+              <a:rPr sz="2400"/>
+              <a:t>Rings = steps in the sequence</a:t>
             </a:r>
           </a:p>
         </p:txBody>
@@ -4979,18 +4973,24 @@
           <a:bodyPr/>
           <a:lstStyle/>
           <a:p>
-            <a:r>
-              <a:t>- Age</a:t>
-            </a:r>
-          </a:p>
-          <a:p>
-            <a:r>
-              <a:t>- Sex</a:t>
-            </a:r>
-          </a:p>
-          <a:p>
-            <a:r>
-              <a:t>- Comorbidities</a:t>
+            <a:pPr/>
+            <a:r>
+              <a:rPr sz="2400"/>
+              <a:t>Age</a:t>
+            </a:r>
+          </a:p>
+          <a:p>
+            <a:pPr/>
+            <a:r>
+              <a:rPr sz="2400"/>
+              <a:t>Sex</a:t>
+            </a:r>
+          </a:p>
+          <a:p>
+            <a:pPr/>
+            <a:r>
+              <a:rPr sz="2400"/>
+              <a:t>Comorbidities</a:t>
             </a:r>
           </a:p>
         </p:txBody>
@@ -5049,23 +5049,33 @@
           <a:bodyPr/>
           <a:lstStyle/>
           <a:p>
-            <a:r>
+            <a:pPr marL="0" indent="0">
+              <a:buNone/>
+            </a:pPr>
+            <a:r>
+              <a:rPr sz="2400"/>
               <a:t>Identify:</a:t>
             </a:r>
           </a:p>
           <a:p>
-            <a:r>
-              <a:t>- Most common pathway</a:t>
-            </a:r>
-          </a:p>
-          <a:p>
-            <a:r>
-              <a:t>- % reaching insulin</a:t>
-            </a:r>
-          </a:p>
-          <a:p>
-            <a:r>
-              <a:t>- Subgroup differences</a:t>
+            <a:pPr/>
+            <a:r>
+              <a:rPr sz="2400"/>
+              <a:t>Most common pathway</a:t>
+            </a:r>
+          </a:p>
+          <a:p>
+            <a:pPr/>
+            <a:r>
+              <a:rPr sz="2400"/>
+              <a:t>% reaching insulin</a:t>
+            </a:r>
+          </a:p>
+          <a:p>
+            <a:pPr/>
+            <a:r>
+              <a:rPr sz="2400"/>
+              <a:t>Subgroup differences</a:t>
             </a:r>
           </a:p>
         </p:txBody>
@@ -5124,18 +5134,24 @@
           <a:bodyPr/>
           <a:lstStyle/>
           <a:p>
-            <a:r>
-              <a:t>- Data quality</a:t>
-            </a:r>
-          </a:p>
-          <a:p>
-            <a:r>
-              <a:t>- Exposure misclassification</a:t>
-            </a:r>
-          </a:p>
-          <a:p>
-            <a:r>
-              <a:t>- Descriptive only</a:t>
+            <a:pPr/>
+            <a:r>
+              <a:rPr sz="2400"/>
+              <a:t>Data quality</a:t>
+            </a:r>
+          </a:p>
+          <a:p>
+            <a:pPr/>
+            <a:r>
+              <a:rPr sz="2400"/>
+              <a:t>Exposure misclassification</a:t>
+            </a:r>
+          </a:p>
+          <a:p>
+            <a:pPr/>
+            <a:r>
+              <a:rPr sz="2400"/>
+              <a:t>Descriptive only</a:t>
             </a:r>
           </a:p>
         </p:txBody>
@@ -5194,18 +5210,24 @@
           <a:bodyPr/>
           <a:lstStyle/>
           <a:p>
-            <a:r>
-              <a:t>- Pathways reveal care patterns</a:t>
-            </a:r>
-          </a:p>
-          <a:p>
-            <a:r>
-              <a:t>- ATLAS simplifies sequencing</a:t>
-            </a:r>
-          </a:p>
-          <a:p>
-            <a:r>
-              <a:t>- Design choices matter</a:t>
+            <a:pPr/>
+            <a:r>
+              <a:rPr sz="2400"/>
+              <a:t>Pathways reveal care patterns</a:t>
+            </a:r>
+          </a:p>
+          <a:p>
+            <a:pPr/>
+            <a:r>
+              <a:rPr sz="2400"/>
+              <a:t>ATLAS simplifies sequencing</a:t>
+            </a:r>
+          </a:p>
+          <a:p>
+            <a:pPr/>
+            <a:r>
+              <a:rPr sz="2400"/>
+              <a:t>Design choices matter</a:t>
             </a:r>
           </a:p>
         </p:txBody>
@@ -5264,23 +5286,33 @@
           <a:bodyPr/>
           <a:lstStyle/>
           <a:p>
-            <a:r>
+            <a:pPr marL="0" indent="0">
+              <a:buNone/>
+            </a:pPr>
+            <a:r>
+              <a:rPr sz="2400"/>
               <a:t>Advanced module:</a:t>
             </a:r>
           </a:p>
           <a:p>
-            <a:r>
-              <a:t>- Persistence</a:t>
-            </a:r>
-          </a:p>
-          <a:p>
-            <a:r>
-              <a:t>- Combination therapy</a:t>
-            </a:r>
-          </a:p>
-          <a:p>
-            <a:r>
-              <a:t>- Sensitivity analysis</a:t>
+            <a:pPr/>
+            <a:r>
+              <a:rPr sz="2400"/>
+              <a:t>Persistence</a:t>
+            </a:r>
+          </a:p>
+          <a:p>
+            <a:pPr/>
+            <a:r>
+              <a:rPr sz="2400"/>
+              <a:t>Combination therapy</a:t>
+            </a:r>
+          </a:p>
+          <a:p>
+            <a:pPr/>
+            <a:r>
+              <a:rPr sz="2400"/>
+              <a:t>Sensitivity analysis</a:t>
             </a:r>
           </a:p>
         </p:txBody>
@@ -5339,23 +5371,31 @@
           <a:bodyPr/>
           <a:lstStyle/>
           <a:p>
-            <a:r>
-              <a:t>- Understand treatment pathways in OMOP</a:t>
-            </a:r>
-          </a:p>
-          <a:p>
-            <a:r>
-              <a:t>- Learn ATLAS pathway analysis</a:t>
-            </a:r>
-          </a:p>
-          <a:p>
-            <a:r>
-              <a:t>- Interpret diabetes treatment patterns</a:t>
-            </a:r>
-          </a:p>
-          <a:p>
-            <a:r>
-              <a:t>- Recognize limitations</a:t>
+            <a:pPr/>
+            <a:r>
+              <a:rPr sz="2400"/>
+              <a:t>Understand treatment pathways in OMOP</a:t>
+            </a:r>
+          </a:p>
+          <a:p>
+            <a:pPr/>
+            <a:r>
+              <a:rPr sz="2400"/>
+              <a:t>Learn ATLAS pathway analysis</a:t>
+            </a:r>
+          </a:p>
+          <a:p>
+            <a:pPr/>
+            <a:r>
+              <a:rPr sz="2400"/>
+              <a:t>Interpret diabetes treatment patterns</a:t>
+            </a:r>
+          </a:p>
+          <a:p>
+            <a:pPr/>
+            <a:r>
+              <a:rPr sz="2400"/>
+              <a:t>Recognize limitations</a:t>
             </a:r>
           </a:p>
         </p:txBody>
@@ -5394,7 +5434,7 @@
           <a:lstStyle/>
           <a:p>
             <a:r>
-              <a:t>Agenda (90 Minutes)</a:t>
+              <a:t>Agenda</a:t>
             </a:r>
           </a:p>
         </p:txBody>
@@ -5414,32 +5454,56 @@
           <a:bodyPr/>
           <a:lstStyle/>
           <a:p>
-            <a:r>
+            <a:pPr marL="0" indent="0">
+              <a:buNone/>
+            </a:pPr>
+            <a:r>
+              <a:rPr sz="2400"/>
               <a:t>1. OMOP &amp; OHDSI overview</a:t>
             </a:r>
           </a:p>
           <a:p>
-            <a:r>
+            <a:pPr marL="0" indent="0">
+              <a:buNone/>
+            </a:pPr>
+            <a:r>
+              <a:rPr sz="2400"/>
               <a:t>2. Treatment pathway concepts</a:t>
             </a:r>
           </a:p>
           <a:p>
-            <a:r>
+            <a:pPr marL="0" indent="0">
+              <a:buNone/>
+            </a:pPr>
+            <a:r>
+              <a:rPr sz="2400"/>
               <a:t>3. Diabetes use case</a:t>
             </a:r>
           </a:p>
           <a:p>
-            <a:r>
+            <a:pPr marL="0" indent="0">
+              <a:buNone/>
+            </a:pPr>
+            <a:r>
+              <a:rPr sz="2400"/>
               <a:t>4. ATLAS walkthrough</a:t>
             </a:r>
           </a:p>
           <a:p>
-            <a:r>
+            <a:pPr marL="0" indent="0">
+              <a:buNone/>
+            </a:pPr>
+            <a:r>
+              <a:rPr sz="2400"/>
               <a:t>5. Interpretation &amp; subgroups</a:t>
             </a:r>
           </a:p>
           <a:p>
-            <a:r>
+            <a:pPr marL="0" indent="0">
+              <a:buNone/>
+            </a:pPr>
+            <a:r>
+              <a:rPr sz="2400"/>
               <a:t>6. Wrap-up</a:t>
             </a:r>
           </a:p>
@@ -5499,28 +5563,40 @@
           <a:bodyPr/>
           <a:lstStyle/>
           <a:p>
-            <a:r>
-              <a:t>Typical progression:</a:t>
-            </a:r>
-          </a:p>
-          <a:p>
-            <a:r>
-              <a:t>- Metformin</a:t>
-            </a:r>
-          </a:p>
-          <a:p>
-            <a:r>
-              <a:t>- Add-on oral agents</a:t>
-            </a:r>
-          </a:p>
-          <a:p>
-            <a:r>
-              <a:t>- Injectable therapies</a:t>
-            </a:r>
-          </a:p>
-          <a:p>
-            <a:r>
-              <a:t>- Insulin</a:t>
+            <a:pPr marL="0" indent="0">
+              <a:buNone/>
+            </a:pPr>
+            <a:r>
+              <a:rPr sz="2400"/>
+              <a:t>Sequence often described for type 2 diabetes (test it against your data):</a:t>
+            </a:r>
+          </a:p>
+          <a:p>
+            <a:pPr/>
+            <a:r>
+              <a:rPr sz="2400"/>
+              <a:t>Metformin</a:t>
+            </a:r>
+          </a:p>
+          <a:p>
+            <a:pPr/>
+            <a:r>
+              <a:rPr sz="2400"/>
+              <a:t>Add-on oral agents</a:t>
+            </a:r>
+          </a:p>
+          <a:p>
+            <a:pPr/>
+            <a:r>
+              <a:rPr sz="2400"/>
+              <a:t>Injectable therapies</a:t>
+            </a:r>
+          </a:p>
+          <a:p>
+            <a:pPr/>
+            <a:r>
+              <a:rPr sz="2400"/>
+              <a:t>Insulin</a:t>
             </a:r>
           </a:p>
         </p:txBody>
@@ -5579,18 +5655,24 @@
           <a:bodyPr/>
           <a:lstStyle/>
           <a:p>
-            <a:r>
-              <a:t>- Observe real-world practice</a:t>
-            </a:r>
-          </a:p>
-          <a:p>
-            <a:r>
-              <a:t>- Compare subgroups</a:t>
-            </a:r>
-          </a:p>
-          <a:p>
-            <a:r>
-              <a:t>- Identify variation</a:t>
+            <a:pPr/>
+            <a:r>
+              <a:rPr sz="2400"/>
+              <a:t>Observe real-world practice</a:t>
+            </a:r>
+          </a:p>
+          <a:p>
+            <a:pPr/>
+            <a:r>
+              <a:rPr sz="2400"/>
+              <a:t>Compare subgroups</a:t>
+            </a:r>
+          </a:p>
+          <a:p>
+            <a:pPr/>
+            <a:r>
+              <a:rPr sz="2400"/>
+              <a:t>Identify variation</a:t>
             </a:r>
           </a:p>
         </p:txBody>
@@ -5649,18 +5731,24 @@
           <a:bodyPr/>
           <a:lstStyle/>
           <a:p>
-            <a:r>
-              <a:t>- CONDITION_OCCURRENCE: Diabetes</a:t>
-            </a:r>
-          </a:p>
-          <a:p>
-            <a:r>
-              <a:t>- DRUG_EXPOSURE: Treatments</a:t>
-            </a:r>
-          </a:p>
-          <a:p>
-            <a:r>
-              <a:t>- Ingredient-level concepts</a:t>
+            <a:pPr/>
+            <a:r>
+              <a:rPr sz="2400"/>
+              <a:t>CONDITION_OCCURRENCE: Diabetes</a:t>
+            </a:r>
+          </a:p>
+          <a:p>
+            <a:pPr/>
+            <a:r>
+              <a:rPr sz="2400"/>
+              <a:t>DRUG_EXPOSURE: Treatments</a:t>
+            </a:r>
+          </a:p>
+          <a:p>
+            <a:pPr/>
+            <a:r>
+              <a:rPr sz="2400"/>
+              <a:t>Event cohorts built from ingredient or class concept sets</a:t>
             </a:r>
           </a:p>
         </p:txBody>
@@ -5699,7 +5787,7 @@
           <a:lstStyle/>
           <a:p>
             <a:r>
-              <a:t>ATLAS: Treatment Pathways</a:t>
+              <a:t>ATLAS: Cohort Pathways</a:t>
             </a:r>
           </a:p>
         </p:txBody>
@@ -5719,8 +5807,10 @@
           <a:bodyPr/>
           <a:lstStyle/>
           <a:p>
-            <a:r>
-              <a:t>ATLAS → Characterizations → Treatment Pathways</a:t>
+            <a:pPr/>
+            <a:r>
+              <a:rPr sz="2400"/>
+              <a:t>ATLAS → Cohort Pathways (left menu) → New</a:t>
             </a:r>
           </a:p>
         </p:txBody>
@@ -5779,18 +5869,24 @@
           <a:bodyPr/>
           <a:lstStyle/>
           <a:p>
-            <a:r>
-              <a:t>- Adults with Type 2 Diabetes</a:t>
-            </a:r>
-          </a:p>
-          <a:p>
-            <a:r>
-              <a:t>- Continuous observation</a:t>
-            </a:r>
-          </a:p>
-          <a:p>
-            <a:r>
-              <a:t>- Index: diagnosis or treatment start</a:t>
+            <a:pPr/>
+            <a:r>
+              <a:rPr sz="2400"/>
+              <a:t>Adults with Type 2 Diabetes</a:t>
+            </a:r>
+          </a:p>
+          <a:p>
+            <a:pPr/>
+            <a:r>
+              <a:rPr sz="2400"/>
+              <a:t>Continuous observation</a:t>
+            </a:r>
+          </a:p>
+          <a:p>
+            <a:pPr/>
+            <a:r>
+              <a:rPr sz="2400"/>
+              <a:t>Index: diagnosis or treatment start</a:t>
             </a:r>
           </a:p>
         </p:txBody>
@@ -5829,7 +5925,7 @@
           <a:lstStyle/>
           <a:p>
             <a:r>
-              <a:t>Selecting Treatment Ingredients</a:t>
+              <a:t>Building the Event Cohorts</a:t>
             </a:r>
           </a:p>
         </p:txBody>
@@ -5849,33 +5945,45 @@
           <a:bodyPr/>
           <a:lstStyle/>
           <a:p>
-            <a:r>
-              <a:t>- Metformin</a:t>
-            </a:r>
-          </a:p>
-          <a:p>
-            <a:r>
-              <a:t>- Sulfonylureas</a:t>
-            </a:r>
-          </a:p>
-          <a:p>
-            <a:r>
-              <a:t>- DPP-4 inhibitors</a:t>
-            </a:r>
-          </a:p>
-          <a:p>
-            <a:r>
-              <a:t>- GLP-1 RAs</a:t>
-            </a:r>
-          </a:p>
-          <a:p>
-            <a:r>
-              <a:t>- SGLT2 inhibitors</a:t>
-            </a:r>
-          </a:p>
-          <a:p>
-            <a:r>
-              <a:t>- Insulin</a:t>
+            <a:pPr/>
+            <a:r>
+              <a:rPr sz="2400"/>
+              <a:t>Metformin</a:t>
+            </a:r>
+          </a:p>
+          <a:p>
+            <a:pPr/>
+            <a:r>
+              <a:rPr sz="2400"/>
+              <a:t>Sulfonylureas</a:t>
+            </a:r>
+          </a:p>
+          <a:p>
+            <a:pPr/>
+            <a:r>
+              <a:rPr sz="2400"/>
+              <a:t>DPP-4 inhibitors</a:t>
+            </a:r>
+          </a:p>
+          <a:p>
+            <a:pPr/>
+            <a:r>
+              <a:rPr sz="2400"/>
+              <a:t>GLP-1 RAs</a:t>
+            </a:r>
+          </a:p>
+          <a:p>
+            <a:pPr/>
+            <a:r>
+              <a:rPr sz="2400"/>
+              <a:t>SGLT2 inhibitors</a:t>
+            </a:r>
+          </a:p>
+          <a:p>
+            <a:pPr/>
+            <a:r>
+              <a:rPr sz="2400"/>
+              <a:t>Insulin</a:t>
             </a:r>
           </a:p>
         </p:txBody>
@@ -5891,7 +5999,7 @@
 <file path=ppt/theme/theme1.xml><?xml version="1.0" encoding="utf-8"?>
 <a:theme xmlns:a="http://schemas.openxmlformats.org/drawingml/2006/main" name="Office Theme">
   <a:themeElements>
-    <a:clrScheme name="ALS TDI">
+    <a:clrScheme name="Office">
       <a:dk1>
         <a:sysClr val="windowText" lastClr="000000"/>
       </a:dk1>
@@ -5899,39 +6007,39 @@
         <a:sysClr val="window" lastClr="FFFFFF"/>
       </a:lt1>
       <a:dk2>
-        <a:srgbClr val="6D2F77"/>
+        <a:srgbClr val="262626"/>
       </a:dk2>
       <a:lt2>
-        <a:srgbClr val="F2EAF4"/>
+        <a:srgbClr val="F2F2F2"/>
       </a:lt2>
       <a:accent1>
-        <a:srgbClr val="904199"/>
+        <a:srgbClr val="404040"/>
       </a:accent1>
       <a:accent2>
-        <a:srgbClr val="B872C0"/>
+        <a:srgbClr val="7F7F7F"/>
       </a:accent2>
       <a:accent3>
-        <a:srgbClr val="6D2F77"/>
+        <a:srgbClr val="A6A6A6"/>
       </a:accent3>
       <a:accent4>
-        <a:srgbClr val="4A4A4A"/>
+        <a:srgbClr val="595959"/>
       </a:accent4>
       <a:accent5>
-        <a:srgbClr val="D9C2DE"/>
+        <a:srgbClr val="BFBFBF"/>
       </a:accent5>
       <a:accent6>
-        <a:srgbClr val="7A3580"/>
+        <a:srgbClr val="262626"/>
       </a:accent6>
       <a:hlink>
-        <a:srgbClr val="904199"/>
+        <a:srgbClr val="000000"/>
       </a:hlink>
       <a:folHlink>
-        <a:srgbClr val="6D2F77"/>
+        <a:srgbClr val="404040"/>
       </a:folHlink>
     </a:clrScheme>
     <a:fontScheme name="Office">
       <a:majorFont>
-        <a:latin typeface="EB Garamond"/>
+        <a:latin typeface="Calibri"/>
         <a:ea typeface=""/>
         <a:cs typeface=""/>
         <a:font script="Jpan" typeface="ＭＳ Ｐゴシック"/>
@@ -6211,7 +6319,7 @@
 <file path=ppt/theme/theme2.xml><?xml version="1.0" encoding="utf-8"?>
 <a:theme xmlns:a="http://schemas.openxmlformats.org/drawingml/2006/main" name="Office Theme">
   <a:themeElements>
-    <a:clrScheme name="ALS TDI">
+    <a:clrScheme name="Office">
       <a:dk1>
         <a:sysClr val="windowText" lastClr="000000"/>
       </a:dk1>
@@ -6219,39 +6327,39 @@
         <a:sysClr val="window" lastClr="FFFFFF"/>
       </a:lt1>
       <a:dk2>
-        <a:srgbClr val="6D2F77"/>
+        <a:srgbClr val="1F497D"/>
       </a:dk2>
       <a:lt2>
-        <a:srgbClr val="F2EAF4"/>
+        <a:srgbClr val="EEECE1"/>
       </a:lt2>
       <a:accent1>
-        <a:srgbClr val="904199"/>
+        <a:srgbClr val="4F81BD"/>
       </a:accent1>
       <a:accent2>
-        <a:srgbClr val="B872C0"/>
+        <a:srgbClr val="C0504D"/>
       </a:accent2>
       <a:accent3>
-        <a:srgbClr val="6D2F77"/>
+        <a:srgbClr val="9BBB59"/>
       </a:accent3>
       <a:accent4>
-        <a:srgbClr val="4A4A4A"/>
+        <a:srgbClr val="8064A2"/>
       </a:accent4>
       <a:accent5>
-        <a:srgbClr val="D9C2DE"/>
+        <a:srgbClr val="4BACC6"/>
       </a:accent5>
       <a:accent6>
-        <a:srgbClr val="7A3580"/>
+        <a:srgbClr val="F79646"/>
       </a:accent6>
       <a:hlink>
-        <a:srgbClr val="904199"/>
+        <a:srgbClr val="0000FF"/>
       </a:hlink>
       <a:folHlink>
-        <a:srgbClr val="6D2F77"/>
+        <a:srgbClr val="800080"/>
       </a:folHlink>
     </a:clrScheme>
     <a:fontScheme name="Office">
       <a:majorFont>
-        <a:latin typeface="EB Garamond"/>
+        <a:latin typeface="Calibri"/>
         <a:ea typeface=""/>
         <a:cs typeface=""/>
         <a:font script="Jpan" typeface="ＭＳ Ｐゴシック"/>

--- a/docs/free-rwe-resources/train-the-trainer/training/day-05-treatment-pathways/kit/Instructor-Deck-with-Notes.pptx
+++ b/docs/free-rwe-resources/train-the-trainer/training/day-05-treatment-pathways/kit/Instructor-Deck-with-Notes.pptx
@@ -518,7 +518,7 @@
           <a:lstStyle/>
           <a:p>
             <a:r>
-              <a:t>This deck is the diabetes worked example for Day 5. Teach the concepts and the ATLAS walkthrough from ATLAS-Treatment-Pathways-Training.pptx first, then use this deck to work one example from cohorts to interpretation.</a:t>
+              <a:t>This deck is the ALS medication worked example for Day 5. Teach the concepts and the ATLAS walkthrough from ATLAS-Treatment-Pathways-Training.pptx first, then use this deck to work one example from cohorts to interpretation.</a:t>
             </a:r>
           </a:p>
         </p:txBody>
@@ -1148,7 +1148,7 @@
           <a:lstStyle/>
           <a:p>
             <a:r>
-              <a:t>By the end of this session, you should be comfortable explaining what a treatment pathway is, how ATLAS constructs them from OMOP data, and how to interpret real-world diabetes care patterns.</a:t>
+              <a:t>By the end of this session, you should be comfortable explaining what a treatment pathway is, how ATLAS constructs them from OMOP data, and how to describe the ALS medication patterns recorded in your data.</a:t>
             </a:r>
           </a:p>
         </p:txBody>
@@ -1288,7 +1288,7 @@
           <a:lstStyle/>
           <a:p>
             <a:r>
-              <a:t>Type 2 diabetes is a common teaching example because several drug classes are used over time, which gives the sequences something to show. Hripcsak et al. (PNAS 2016) reported that diabetes favored a single first-line medication, metformin, more than hypertension or depression did, with significant heterogeneity among data sources. Present the list as something to test in the data, not as a rule.</a:t>
+              <a:t>ALS has few medications, so the pathways are short: a first medication, and sometimes a second that is added or started later. That makes the plot easy to read and puts the attention on data capture: which medications are recorded as drug exposures, which are given in a clinic and may be recorded as procedures, and which are missing because they were supplied outside the health system. No published pathway result is assumed for this example; describe what the data show. The reference pathway study on OHDSI data, Hripcsak et al. (PNAS 2016), covered diabetes, hypertension, and depression.</a:t>
             </a:r>
           </a:p>
         </p:txBody>
@@ -1638,7 +1638,7 @@
           <a:lstStyle/>
           <a:p>
             <a:r>
-              <a:t>Each item is its own event cohort. Metformin is a single ingredient; the others are drug classes, built from a class concept or a list of ingredients with descendants included. Cohort Pathways takes cohorts as input, not concept sets.</a:t>
+              <a:t>Each item is its own event cohort, built from an ingredient concept set with descendants. Cohort Pathways takes cohorts as input, not concept sets. Add other ALS medications your site records, and leave out medications given for symptoms unless the question is about them.</a:t>
             </a:r>
           </a:p>
         </p:txBody>
@@ -4660,7 +4660,7 @@
           <a:lstStyle/>
           <a:p>
             <a:r>
-              <a:t>OHDSI / OMOP Training: Treatment Pathway Analysis (Diabetes)</a:t>
+              <a:t>OHDSI / OMOP Training: Treatment Pathway Analysis (ALS Medications)</a:t>
             </a:r>
           </a:p>
         </p:txBody>
@@ -5068,7 +5068,7 @@
             <a:pPr/>
             <a:r>
               <a:rPr sz="2400"/>
-              <a:t>% reaching insulin</a:t>
+              <a:t>% of paths with edaravone after riluzole</a:t>
             </a:r>
           </a:p>
           <a:p>
@@ -5388,7 +5388,7 @@
             <a:pPr/>
             <a:r>
               <a:rPr sz="2400"/>
-              <a:t>Interpret diabetes treatment patterns</a:t>
+              <a:t>Interpret ALS medication patterns</a:t>
             </a:r>
           </a:p>
           <a:p>
@@ -5477,7 +5477,7 @@
             </a:pPr>
             <a:r>
               <a:rPr sz="2400"/>
-              <a:t>3. Diabetes use case</a:t>
+              <a:t>3. ALS medication use case</a:t>
             </a:r>
           </a:p>
           <a:p>
@@ -5543,7 +5543,7 @@
           <a:lstStyle/>
           <a:p>
             <a:r>
-              <a:t>Diabetes Background</a:t>
+              <a:t>ALS Medication Background</a:t>
             </a:r>
           </a:p>
         </p:txBody>
@@ -5568,35 +5568,35 @@
             </a:pPr>
             <a:r>
               <a:rPr sz="2400"/>
-              <a:t>Sequence often described for type 2 diabetes (test it against your data):</a:t>
+              <a:t>Medications to look for in the data:</a:t>
             </a:r>
           </a:p>
           <a:p>
             <a:pPr/>
             <a:r>
               <a:rPr sz="2400"/>
-              <a:t>Metformin</a:t>
+              <a:t>Riluzole</a:t>
             </a:r>
           </a:p>
           <a:p>
             <a:pPr/>
             <a:r>
               <a:rPr sz="2400"/>
-              <a:t>Add-on oral agents</a:t>
+              <a:t>Edaravone</a:t>
             </a:r>
           </a:p>
           <a:p>
             <a:pPr/>
             <a:r>
               <a:rPr sz="2400"/>
-              <a:t>Injectable therapies</a:t>
+              <a:t>Tofersen</a:t>
             </a:r>
           </a:p>
           <a:p>
             <a:pPr/>
             <a:r>
               <a:rPr sz="2400"/>
-              <a:t>Insulin</a:t>
+              <a:t>Sodium phenylbutyrate and taurursodiol</a:t>
             </a:r>
           </a:p>
         </p:txBody>
@@ -5734,7 +5734,7 @@
             <a:pPr/>
             <a:r>
               <a:rPr sz="2400"/>
-              <a:t>CONDITION_OCCURRENCE: Diabetes</a:t>
+              <a:t>CONDITION_OCCURRENCE: Motor neuron disease</a:t>
             </a:r>
           </a:p>
           <a:p>
@@ -5849,7 +5849,7 @@
           <a:lstStyle/>
           <a:p>
             <a:r>
-              <a:t>Defining a Diabetes Cohort</a:t>
+              <a:t>Defining the Target Cohort</a:t>
             </a:r>
           </a:p>
         </p:txBody>
@@ -5872,7 +5872,7 @@
             <a:pPr/>
             <a:r>
               <a:rPr sz="2400"/>
-              <a:t>Adults with Type 2 Diabetes</a:t>
+              <a:t>People with a motor neuron disease diagnosis</a:t>
             </a:r>
           </a:p>
           <a:p>
@@ -5948,42 +5948,28 @@
             <a:pPr/>
             <a:r>
               <a:rPr sz="2400"/>
-              <a:t>Metformin</a:t>
+              <a:t>Riluzole</a:t>
             </a:r>
           </a:p>
           <a:p>
             <a:pPr/>
             <a:r>
               <a:rPr sz="2400"/>
-              <a:t>Sulfonylureas</a:t>
+              <a:t>Edaravone</a:t>
             </a:r>
           </a:p>
           <a:p>
             <a:pPr/>
             <a:r>
               <a:rPr sz="2400"/>
-              <a:t>DPP-4 inhibitors</a:t>
+              <a:t>Tofersen</a:t>
             </a:r>
           </a:p>
           <a:p>
             <a:pPr/>
             <a:r>
               <a:rPr sz="2400"/>
-              <a:t>GLP-1 RAs</a:t>
-            </a:r>
-          </a:p>
-          <a:p>
-            <a:pPr/>
-            <a:r>
-              <a:rPr sz="2400"/>
-              <a:t>SGLT2 inhibitors</a:t>
-            </a:r>
-          </a:p>
-          <a:p>
-            <a:pPr/>
-            <a:r>
-              <a:rPr sz="2400"/>
-              <a:t>Insulin</a:t>
+              <a:t>Sodium phenylbutyrate and taurursodiol</a:t>
             </a:r>
           </a:p>
         </p:txBody>
